--- a/Gradwell-CDR-Pipeline-Solution-Overview.pptx
+++ b/Gradwell-CDR-Pipeline-Solution-Overview.pptx
@@ -2943,7 +2943,7 @@
                 <a:ea typeface="Courier New" pitchFamily="34" charset="-122"/>
                 <a:cs typeface="Courier New" pitchFamily="34" charset="-120"/>
               </a:rPr>
-              <a:t>0 3 1 * ? *</a:t>
+              <a:t>09:00 UK, 1st</a:t>
             </a:r>
             <a:endParaRPr lang="en-US" sz="1500" dirty="0"/>
           </a:p>
@@ -3402,7 +3402,7 @@
                 <a:ea typeface="Calibri" pitchFamily="34" charset="-122"/>
                 <a:cs typeface="Calibri" pitchFamily="34" charset="-120"/>
               </a:rPr>
-              <a:t>CloudWatch alarm on Errors, wired to Datadog Forwarder SNS topic</a:t>
+              <a:t>CloudWatch alarm on Errors; logs kept 400 days</a:t>
             </a:r>
             <a:endParaRPr lang="en-US" sz="1250" dirty="0"/>
           </a:p>
@@ -3485,7 +3485,7 @@
                 <a:ea typeface="Calibri" pitchFamily="34" charset="-122"/>
                 <a:cs typeface="Calibri" pitchFamily="34" charset="-120"/>
               </a:rPr>
-              <a:t>1st-of-month freshness check before downloading</a:t>
+              <a:t>Coded errors with screenshots; 1st-of-month freshness check</a:t>
             </a:r>
             <a:endParaRPr lang="en-US" sz="1250" dirty="0"/>
           </a:p>
@@ -3607,7 +3607,7 @@
                 <a:ea typeface="Calibri" pitchFamily="34" charset="-122"/>
                 <a:cs typeface="Calibri" pitchFamily="34" charset="-120"/>
               </a:rPr>
-              <a:t>No automated secret rotation — credential rotation is manual</a:t>
+              <a:t>CDR-E06: the automation must select a customer first</a:t>
             </a:r>
             <a:endParaRPr lang="en-US" sz="1250" dirty="0"/>
           </a:p>
@@ -3690,7 +3690,7 @@
                 <a:ea typeface="Calibri" pitchFamily="34" charset="-122"/>
                 <a:cs typeface="Calibri" pitchFamily="34" charset="-120"/>
               </a:rPr>
-              <a:t>CloudWatch Logs use default AWS-managed encryption, not a customer-managed KMS key</a:t>
+              <a:t>Manual secret rotation; logs use AWS-managed keys, not KMS</a:t>
             </a:r>
             <a:endParaRPr lang="en-US" sz="1250" dirty="0"/>
           </a:p>
@@ -3773,7 +3773,7 @@
                 <a:ea typeface="Calibri" pitchFamily="34" charset="-122"/>
                 <a:cs typeface="Calibri" pitchFamily="34" charset="-120"/>
               </a:rPr>
-              <a:t>DatadogForwarderTopicArn still needs the real Forwarder topic ARN</a:t>
+              <a:t>DatadogForwarderTopicArn needs a Forwarder topic in eu-west-2</a:t>
             </a:r>
             <a:endParaRPr lang="en-US" sz="1250" dirty="0"/>
           </a:p>
@@ -4010,7 +4010,7 @@
                 <a:ea typeface="Courier New" pitchFamily="34" charset="-122"/>
                 <a:cs typeface="Courier New" pitchFamily="34" charset="-120"/>
               </a:rPr>
-              <a:t>v1.0</a:t>
+              <a:t>v1.3</a:t>
             </a:r>
             <a:endParaRPr lang="en-US" sz="1600" dirty="0"/>
           </a:p>
@@ -4049,7 +4049,7 @@
                 <a:ea typeface="Calibri" pitchFamily="34" charset="-122"/>
                 <a:cs typeface="Calibri" pitchFamily="34" charset="-120"/>
               </a:rPr>
-              <a:t>Initial Lambda + Node.js implementation, deployed and verified end-to-end against the live portal</a:t>
+              <a:t>v1.0–1.3: Lambda + Node.js build, Errors alarm, freshness check, S3 scoping, run timing</a:t>
             </a:r>
             <a:endParaRPr lang="en-US" sz="1350" dirty="0"/>
           </a:p>
@@ -4137,7 +4137,7 @@
                 <a:ea typeface="Courier New" pitchFamily="34" charset="-122"/>
                 <a:cs typeface="Courier New" pitchFamily="34" charset="-120"/>
               </a:rPr>
-              <a:t>v1.1</a:t>
+              <a:t>v1.6</a:t>
             </a:r>
             <a:endParaRPr lang="en-US" sz="1600" dirty="0"/>
           </a:p>
@@ -4176,7 +4176,7 @@
                 <a:ea typeface="Calibri" pitchFamily="34" charset="-122"/>
                 <a:cs typeface="Calibri" pitchFamily="34" charset="-120"/>
               </a:rPr>
-              <a:t>Added CloudWatch Errors alarm (Datadog alerting) and the 1st-of-month freshness check</a:t>
+              <a:t>v1.4–1.6: EventBridge Scheduler at 09:00 UK, optional Datadog, direct page navigation</a:t>
             </a:r>
             <a:endParaRPr lang="en-US" sz="1350" dirty="0"/>
           </a:p>
@@ -4264,7 +4264,7 @@
                 <a:ea typeface="Courier New" pitchFamily="34" charset="-122"/>
                 <a:cs typeface="Courier New" pitchFamily="34" charset="-120"/>
               </a:rPr>
-              <a:t>v1.2</a:t>
+              <a:t>v1.8</a:t>
             </a:r>
             <a:endParaRPr lang="en-US" sz="1600" dirty="0"/>
           </a:p>
@@ -4303,7 +4303,7 @@
                 <a:ea typeface="Calibri" pitchFamily="34" charset="-122"/>
                 <a:cs typeface="Calibri" pitchFamily="34" charset="-120"/>
               </a:rPr>
-              <a:t>Scoped the S3 write permission from bucket-wide to cdr/* and debug/* prefixes only</a:t>
+              <a:t>v1.7–1.8: coded errors with screenshots, logs kept 400 days, CDR_URL (/cdrs)</a:t>
             </a:r>
             <a:endParaRPr lang="en-US" sz="1350" dirty="0"/>
           </a:p>
@@ -6332,7 +6332,7 @@
                 <a:ea typeface="Calibri" pitchFamily="34" charset="-122"/>
                 <a:cs typeface="Calibri" pitchFamily="34" charset="-120"/>
               </a:rPr>
-              <a:t>03:00</a:t>
+              <a:t>09:00</a:t>
             </a:r>
             <a:endParaRPr lang="en-US" sz="4000" dirty="0"/>
           </a:p>
@@ -6371,7 +6371,7 @@
                 <a:ea typeface="Calibri" pitchFamily="34" charset="-122"/>
                 <a:cs typeface="Calibri" pitchFamily="34" charset="-120"/>
               </a:rPr>
-              <a:t>UTC, on the 1st of every month</a:t>
+              <a:t>UK time, on the 1st of every month</a:t>
             </a:r>
             <a:endParaRPr lang="en-US" sz="1200" dirty="0"/>
           </a:p>
@@ -6595,7 +6595,7 @@
                 <a:ea typeface="Calibri" pitchFamily="34" charset="-122"/>
                 <a:cs typeface="Calibri" pitchFamily="34" charset="-120"/>
               </a:rPr>
-              <a:t>external pages visited: SSO → Admin → SDR</a:t>
+              <a:t>external pages visited: SSO → Admin → CDR</a:t>
             </a:r>
             <a:endParaRPr lang="en-US" sz="1200" dirty="0"/>
           </a:p>
@@ -6634,7 +6634,7 @@
                 <a:ea typeface="Calibri" pitchFamily="34" charset="-122"/>
                 <a:cs typeface="Calibri" pitchFamily="34" charset="-120"/>
               </a:rPr>
-              <a:t>Built on AWS SAM (CloudFormation) — Lambda, S3, Secrets Manager, EventBridge, and CloudWatch, entirely serverless.</a:t>
+              <a:t>Built on AWS SAM (CloudFormation) — Lambda, S3, Secrets Manager, EventBridge Scheduler, and CloudWatch, entirely serverless.</a:t>
             </a:r>
             <a:endParaRPr lang="en-US" sz="1300" dirty="0"/>
           </a:p>
@@ -7101,7 +7101,7 @@
                   <a:srgbClr val="4E6167"/>
                 </a:solidFill>
               </a:rPr>
-              <a:t>Schedule rule
+              <a:t>Scheduler
 </a:t>
             </a:r>
             <a:endParaRPr lang="en-US" sz="1250" dirty="0"/>
@@ -7116,7 +7116,7 @@
                   <a:srgbClr val="4E6167"/>
                 </a:solidFill>
               </a:rPr>
-              <a:t>cron(0 3 1 * ? *)</a:t>
+              <a:t>09:00 Europe/London</a:t>
             </a:r>
             <a:endParaRPr lang="en-US" sz="1250" dirty="0"/>
           </a:p>
@@ -7791,7 +7791,7 @@
                   <a:srgbClr val="152227"/>
                 </a:solidFill>
               </a:rPr>
-              <a:t>SDR list → verify + download
+              <a:t>CDR list → verify + download
 </a:t>
             </a:r>
             <a:endParaRPr lang="en-US" sz="1050" dirty="0"/>
@@ -7806,7 +7806,7 @@
                   <a:srgbClr val="4E6167"/>
                 </a:solidFill>
               </a:rPr>
-              <a:t>admin.prod.gradwell.com/sdrs</a:t>
+              <a:t>admin.prod.gradwell.com/cdrs</a:t>
             </a:r>
             <a:endParaRPr lang="en-US" sz="1050" dirty="0"/>
           </a:p>
@@ -7845,7 +7845,7 @@
                 <a:ea typeface="Calibri" pitchFamily="34" charset="-122"/>
                 <a:cs typeface="Calibri" pitchFamily="34" charset="-120"/>
               </a:rPr>
-              <a:t>1st of month only: not yet published → throws (see CloudWatch)</a:t>
+              <a:t>1st of month only: not yet published → CDR-E09 (see CloudWatch)</a:t>
             </a:r>
             <a:endParaRPr lang="en-US" sz="800" dirty="0"/>
           </a:p>
@@ -8142,7 +8142,7 @@
                   <a:srgbClr val="4E6167"/>
                 </a:solidFill>
               </a:rPr>
-              <a:t>execution + error traces</a:t>
+              <a:t>coded errors · kept 400 days</a:t>
             </a:r>
             <a:endParaRPr lang="en-US" sz="1150" dirty="0"/>
           </a:p>
@@ -8544,7 +8544,7 @@
                 <a:ea typeface="Calibri" pitchFamily="34" charset="-122"/>
                 <a:cs typeface="Calibri" pitchFamily="34" charset="-120"/>
               </a:rPr>
-              <a:t>EventBridge fires on schedule</a:t>
+              <a:t>Scheduler fires at 09:00 UK</a:t>
             </a:r>
             <a:endParaRPr lang="en-US" sz="1000" dirty="0"/>
           </a:p>
@@ -8956,7 +8956,7 @@
                 <a:ea typeface="Calibri" pitchFamily="34" charset="-122"/>
                 <a:cs typeface="Calibri" pitchFamily="34" charset="-120"/>
               </a:rPr>
-              <a:t>Admin → SDR list</a:t>
+              <a:t>Admin → CDR list</a:t>
             </a:r>
             <a:endParaRPr lang="en-US" sz="1000" dirty="0"/>
           </a:p>
@@ -9574,7 +9574,7 @@
                 <a:ea typeface="Calibri" pitchFamily="34" charset="-122"/>
                 <a:cs typeface="Calibri" pitchFamily="34" charset="-120"/>
               </a:rPr>
-              <a:t>Logs to CloudWatch; alarm to Datadog</a:t>
+              <a:t>Coded errors, screenshots, alarm</a:t>
             </a:r>
             <a:endParaRPr lang="en-US" sz="1000" dirty="0"/>
           </a:p>
@@ -10050,7 +10050,7 @@
                 <a:ea typeface="Courier New" pitchFamily="34" charset="-122"/>
                 <a:cs typeface="Courier New" pitchFamily="34" charset="-120"/>
               </a:rPr>
-              <a:t>   → throw error</a:t>
+              <a:t>   → throw CDR-E09</a:t>
             </a:r>
             <a:endParaRPr lang="en-US" sz="1200" dirty="0"/>
           </a:p>
@@ -11051,7 +11051,7 @@
                 <a:ea typeface="Calibri" pitchFamily="34" charset="-122"/>
                 <a:cs typeface="Calibri" pitchFamily="34" charset="-120"/>
               </a:rPr>
-              <a:t>CloudWatch alarm on Errors, forwarded to Datadog — failures don't go silent</a:t>
+              <a:t>Coded errors (CDR-E01–E11) with screenshots, plus a CloudWatch alarm on Errors</a:t>
             </a:r>
             <a:endParaRPr lang="en-US" sz="1100" dirty="0"/>
           </a:p>
@@ -11728,7 +11728,7 @@
                 <a:ea typeface="Calibri" pitchFamily="34" charset="-122"/>
                 <a:cs typeface="Calibri" pitchFamily="34" charset="-120"/>
               </a:rPr>
-              <a:t>A 1st-of-month ALARM can legitimately mean “Gradwell hasn't published yet,” not just a bug — check the log message first</a:t>
+              <a:t>A 1st-of-month ALARM can legitimately mean “Gradwell hasn't published yet,” not just a bug — check the error code first (CDR-E09)</a:t>
             </a:r>
             <a:endParaRPr lang="en-US" sz="1300" dirty="0"/>
           </a:p>
@@ -11789,7 +11789,7 @@
                 <a:ea typeface="Calibri" pitchFamily="34" charset="-122"/>
                 <a:cs typeface="Calibri" pitchFamily="34" charset="-120"/>
               </a:rPr>
-              <a:t>Status: alarm and SNS wiring deployed — DatadogForwarderTopicArn still needs the real Forwarder topic ARN before alerts reach Datadog.</a:t>
+              <a:t>Status: alarm deployed — set DatadogForwarderTopicArn to a Forwarder SNS topic in eu-west-2 before alerts reach Datadog.</a:t>
             </a:r>
             <a:endParaRPr lang="en-US" sz="1150" dirty="0"/>
           </a:p>

--- a/Gradwell-CDR-Pipeline-Solution-Overview.pptx
+++ b/Gradwell-CDR-Pipeline-Solution-Overview.pptx
@@ -9805,7 +9805,7 @@
                 <a:ea typeface="Calibri" pitchFamily="34" charset="-122"/>
                 <a:cs typeface="Calibri" pitchFamily="34" charset="-120"/>
               </a:rPr>
-              <a:t>On the 1st of the month, the newest SDR row should cover the period that just completed</a:t>
+              <a:t>On the 1st of the month, the newest CDR row should cover the period that just completed</a:t>
             </a:r>
             <a:endParaRPr lang="en-US" sz="1500" dirty="0"/>
           </a:p>
@@ -10010,7 +10010,7 @@
                 <a:ea typeface="Courier New" pitchFamily="34" charset="-122"/>
                 <a:cs typeface="Courier New" pitchFamily="34" charset="-120"/>
               </a:rPr>
-              <a:t>IF newest SDR end-date ≠</a:t>
+              <a:t>IF newest CDR end-date ≠</a:t>
             </a:r>
             <a:endParaRPr lang="en-US" sz="1200" dirty="0"/>
           </a:p>
